--- a/Шаблон ЦЗС.pptx
+++ b/Шаблон ЦЗС.pptx
@@ -248,7 +248,7 @@
   </p:defaultTextStyle>
   <p:extLst>
     <p:ext uri="{EFAFB233-063F-42B5-8137-9DF3F51BA10A}">
-      <p15:sldGuideLst xmlns:ahyp="http://schemas.microsoft.com/office/drawing/2018/hyperlinkcolor" xmlns:p15="http://schemas.microsoft.com/office/powerpoint/2012/main" xmlns:p14="http://schemas.microsoft.com/office/powerpoint/2010/main" xmlns:com="http://schemas.openxmlformats.org/drawingml/2006/compatibility" xmlns:pvml="urn:schemas-microsoft-com:office:powerpoint" xmlns:v="urn:schemas-microsoft-com:vml" xmlns:o="urn:schemas-microsoft-com:office:office" xmlns:dgm="http://schemas.openxmlformats.org/drawingml/2006/diagram" xmlns:c="http://schemas.openxmlformats.org/drawingml/2006/chart" xmlns:mv="urn:schemas-microsoft-com:mac:vml" xmlns:mc="http://schemas.openxmlformats.org/markup-compatibility/2006" xmlns="">
+      <p15:sldGuideLst xmlns:p15="http://schemas.microsoft.com/office/powerpoint/2012/main">
         <p15:guide id="1" pos="279">
           <p15:clr>
             <a:srgbClr val="A4A3A4"/>
@@ -307,7 +307,7 @@
       </p15:sldGuideLst>
     </p:ext>
     <p:ext uri="GoogleSlidesCustomDataVersion2">
-      <go:slidesCustomData xmlns:go="http://customooxmlschemas.google.com/" xmlns:ahyp="http://schemas.microsoft.com/office/drawing/2018/hyperlinkcolor" xmlns:p15="http://schemas.microsoft.com/office/powerpoint/2012/main" xmlns:p14="http://schemas.microsoft.com/office/powerpoint/2010/main" xmlns:com="http://schemas.openxmlformats.org/drawingml/2006/compatibility" xmlns:pvml="urn:schemas-microsoft-com:office:powerpoint" xmlns:v="urn:schemas-microsoft-com:vml" xmlns:o="urn:schemas-microsoft-com:office:office" xmlns:dgm="http://schemas.openxmlformats.org/drawingml/2006/diagram" xmlns:c="http://schemas.openxmlformats.org/drawingml/2006/chart" xmlns:mv="urn:schemas-microsoft-com:mac:vml" xmlns:mc="http://schemas.openxmlformats.org/markup-compatibility/2006" xmlns="" r:id="rId14" roundtripDataSignature="AMtx7miycLHMzGKAkpP54Qo2s5YLjaRw/Q=="/>
+      <go:slidesCustomData xmlns="" xmlns:mc="http://schemas.openxmlformats.org/markup-compatibility/2006" xmlns:mv="urn:schemas-microsoft-com:mac:vml" xmlns:c="http://schemas.openxmlformats.org/drawingml/2006/chart" xmlns:dgm="http://schemas.openxmlformats.org/drawingml/2006/diagram" xmlns:o="urn:schemas-microsoft-com:office:office" xmlns:v="urn:schemas-microsoft-com:vml" xmlns:pvml="urn:schemas-microsoft-com:office:powerpoint" xmlns:com="http://schemas.openxmlformats.org/drawingml/2006/compatibility" xmlns:p14="http://schemas.microsoft.com/office/powerpoint/2010/main" xmlns:p15="http://schemas.microsoft.com/office/powerpoint/2012/main" xmlns:ahyp="http://schemas.microsoft.com/office/drawing/2018/hyperlinkcolor" xmlns:go="http://customooxmlschemas.google.com/" r:id="rId14" roundtripDataSignature="AMtx7miycLHMzGKAkpP54Qo2s5YLjaRw/Q=="/>
     </p:ext>
   </p:extLst>
 </p:presentation>
@@ -12921,7 +12921,7 @@
               <a:buNone/>
             </a:pPr>
             <a:r>
-              <a:rPr lang="en-US" sz="3600" dirty="0" smtClean="0">
+              <a:rPr lang="en-US" sz="3600" dirty="0">
                 <a:solidFill>
                   <a:schemeClr val="lt1"/>
                 </a:solidFill>
@@ -14171,7 +14171,7 @@
               <a:t> </a:t>
             </a:r>
             <a:r>
-              <a:rPr lang="ru-RU" sz="3500" dirty="0" smtClean="0">
+              <a:rPr lang="ru-RU" sz="3500" dirty="0">
                 <a:solidFill>
                   <a:srgbClr val="1E53A4"/>
                 </a:solidFill>
@@ -14183,7 +14183,7 @@
               <a:t>ЦЗС™</a:t>
             </a:r>
             <a:r>
-              <a:rPr lang="ru-RU" sz="2000" dirty="0" smtClean="0">
+              <a:rPr lang="ru-RU" sz="2000" dirty="0">
                 <a:solidFill>
                   <a:srgbClr val="1E53A4"/>
                 </a:solidFill>
@@ -14420,46 +14420,10 @@
                 <a:cs typeface="Arial"/>
                 <a:sym typeface="Arial"/>
               </a:rPr>
-              <a:t>Получите доступ к этим </a:t>
-            </a:r>
-            <a:r>
-              <a:rPr lang="ru-RU" sz="2000" dirty="0" smtClean="0">
-                <a:solidFill>
-                  <a:schemeClr val="lt1"/>
-                </a:solidFill>
-                <a:latin typeface="Arial"/>
-                <a:ea typeface="Arial"/>
-                <a:cs typeface="Arial"/>
-                <a:sym typeface="Arial"/>
-              </a:rPr>
-              <a:t>ресурсам </a:t>
-            </a:r>
-            <a:r>
-              <a:rPr lang="ru-RU" sz="2000" dirty="0">
-                <a:solidFill>
-                  <a:schemeClr val="lt1"/>
-                </a:solidFill>
-                <a:latin typeface="Arial"/>
-                <a:ea typeface="Arial"/>
-                <a:cs typeface="Arial"/>
-                <a:sym typeface="Arial"/>
-              </a:rPr>
-              <a:t>в </a:t>
-            </a:r>
-            <a:r>
-              <a:rPr lang="ru-RU" sz="2000" dirty="0" smtClean="0">
-                <a:solidFill>
-                  <a:schemeClr val="lt1"/>
-                </a:solidFill>
-                <a:latin typeface="Arial"/>
-                <a:ea typeface="Arial"/>
-                <a:cs typeface="Arial"/>
-                <a:sym typeface="Arial"/>
-              </a:rPr>
-              <a:t/>
+              <a:t>Получите доступ к этим ресурсам в </a:t>
             </a:r>
             <a:br>
-              <a:rPr lang="ru-RU" sz="2000" dirty="0" smtClean="0">
+              <a:rPr lang="ru-RU" sz="2000" dirty="0">
                 <a:solidFill>
                   <a:schemeClr val="lt1"/>
                 </a:solidFill>
@@ -14470,7 +14434,7 @@
               </a:rPr>
             </a:br>
             <a:r>
-              <a:rPr lang="ru-RU" sz="2000" dirty="0" smtClean="0">
+              <a:rPr lang="ru-RU" sz="2000" dirty="0">
                 <a:solidFill>
                   <a:schemeClr val="lt1"/>
                 </a:solidFill>
@@ -14479,34 +14443,10 @@
                 <a:cs typeface="Arial"/>
                 <a:sym typeface="Arial"/>
               </a:rPr>
-              <a:t>вашем </a:t>
+              <a:t>вашем личном кабинете на сайте </a:t>
             </a:r>
             <a:r>
-              <a:rPr lang="ru-RU" sz="2000" dirty="0">
-                <a:solidFill>
-                  <a:schemeClr val="lt1"/>
-                </a:solidFill>
-                <a:latin typeface="Arial"/>
-                <a:ea typeface="Arial"/>
-                <a:cs typeface="Arial"/>
-                <a:sym typeface="Arial"/>
-              </a:rPr>
-              <a:t>личном </a:t>
-            </a:r>
-            <a:r>
-              <a:rPr lang="ru-RU" sz="2000" dirty="0" smtClean="0">
-                <a:solidFill>
-                  <a:schemeClr val="lt1"/>
-                </a:solidFill>
-                <a:latin typeface="Arial"/>
-                <a:ea typeface="Arial"/>
-                <a:cs typeface="Arial"/>
-                <a:sym typeface="Arial"/>
-              </a:rPr>
-              <a:t>кабинете на сайте </a:t>
-            </a:r>
-            <a:r>
-              <a:rPr lang="ru-RU" sz="2000" b="1" dirty="0" smtClean="0">
+              <a:rPr lang="ru-RU" sz="2000" b="1" dirty="0">
                 <a:solidFill>
                   <a:schemeClr val="lt1"/>
                 </a:solidFill>
@@ -14518,7 +14458,7 @@
               <a:t>ЦЗС</a:t>
             </a:r>
             <a:r>
-              <a:rPr lang="ru-RU" sz="2000" b="1" dirty="0" smtClean="0">
+              <a:rPr lang="ru-RU" sz="2000" b="1" dirty="0">
                 <a:solidFill>
                   <a:schemeClr val="bg1"/>
                 </a:solidFill>
@@ -14823,7 +14763,7 @@
                 <a:buNone/>
               </a:pPr>
               <a:r>
-                <a:rPr lang="ru-RU" sz="1000" dirty="0" smtClean="0">
+                <a:rPr lang="ru-RU" sz="1000" dirty="0">
                   <a:solidFill>
                     <a:schemeClr val="lt1"/>
                   </a:solidFill>
@@ -14835,7 +14775,7 @@
                 <a:t>2</a:t>
               </a:r>
               <a:r>
-                <a:rPr lang="ru-RU" sz="1000" dirty="0" smtClean="0">
+                <a:rPr lang="ru-RU" sz="1000" dirty="0">
                   <a:solidFill>
                     <a:srgbClr val="84B4E0"/>
                   </a:solidFill>
@@ -15288,7 +15228,7 @@
               <a:buNone/>
             </a:pPr>
             <a:r>
-              <a:rPr lang="ru-RU" sz="3500" dirty="0" smtClean="0">
+              <a:rPr lang="ru-RU" sz="3500" dirty="0">
                 <a:solidFill>
                   <a:srgbClr val="1E53A4"/>
                 </a:solidFill>
@@ -15296,7 +15236,7 @@
               <a:t>В 2025 году по категории </a:t>
             </a:r>
             <a:r>
-              <a:rPr lang="en-US" sz="3500" dirty="0" smtClean="0">
+              <a:rPr lang="en-US" sz="3500" dirty="0">
                 <a:solidFill>
                   <a:srgbClr val="1E53A4"/>
                 </a:solidFill>
@@ -15350,7 +15290,7 @@
               <a:buNone/>
             </a:pPr>
             <a:r>
-              <a:rPr lang="en-US" sz="3500" dirty="0" smtClean="0">
+              <a:rPr lang="en-US" sz="3500" dirty="0">
                 <a:solidFill>
                   <a:srgbClr val="1E53A4"/>
                 </a:solidFill>
@@ -15396,7 +15336,7 @@
           <a:p>
             <a:pPr lvl="0"/>
             <a:r>
-              <a:rPr lang="en-US" sz="3500" dirty="0" smtClean="0">
+              <a:rPr lang="en-US" sz="3500" dirty="0">
                 <a:solidFill>
                   <a:srgbClr val="1E53A4"/>
                 </a:solidFill>
@@ -15438,7 +15378,7 @@
           <a:p>
             <a:pPr lvl="0"/>
             <a:r>
-              <a:rPr lang="en-US" sz="3500" dirty="0" smtClean="0">
+              <a:rPr lang="en-US" sz="3500" dirty="0">
                 <a:solidFill>
                   <a:srgbClr val="1E53A4"/>
                 </a:solidFill>
@@ -15538,7 +15478,7 @@
               <a:buNone/>
             </a:pPr>
             <a:r>
-              <a:rPr lang="ru-RU" dirty="0" smtClean="0">
+              <a:rPr lang="ru-RU" dirty="0">
                 <a:solidFill>
                   <a:schemeClr val="dk1"/>
                 </a:solidFill>
@@ -15546,14 +15486,14 @@
               <a:t>из них успешных</a:t>
             </a:r>
             <a:br>
-              <a:rPr lang="ru-RU" dirty="0" smtClean="0">
+              <a:rPr lang="ru-RU" dirty="0">
                 <a:solidFill>
                   <a:schemeClr val="dk1"/>
                 </a:solidFill>
               </a:rPr>
             </a:br>
             <a:r>
-              <a:rPr lang="ru-RU" dirty="0" smtClean="0">
+              <a:rPr lang="ru-RU" dirty="0">
                 <a:solidFill>
                   <a:schemeClr val="dk1"/>
                 </a:solidFill>
@@ -15599,7 +15539,7 @@
               <a:buNone/>
             </a:pPr>
             <a:r>
-              <a:rPr lang="ru-RU" dirty="0" smtClean="0">
+              <a:rPr lang="ru-RU" dirty="0">
                 <a:solidFill>
                   <a:schemeClr val="dk1"/>
                 </a:solidFill>
@@ -15650,7 +15590,7 @@
           <a:p>
             <a:pPr lvl="0" algn="ctr"/>
             <a:r>
-              <a:rPr lang="en-US" dirty="0" smtClean="0">
+              <a:rPr lang="en-US" dirty="0">
                 <a:latin typeface="Calibri"/>
                 <a:ea typeface="Calibri"/>
                 <a:cs typeface="Calibri"/>
@@ -16326,7 +16266,7 @@
                 <a:buNone/>
               </a:pPr>
               <a:r>
-                <a:rPr lang="ru-RU" sz="1000" dirty="0" smtClean="0">
+                <a:rPr lang="ru-RU" sz="1000" dirty="0">
                   <a:solidFill>
                     <a:schemeClr val="lt1"/>
                   </a:solidFill>
@@ -16393,18 +16333,10 @@
                   <a:srgbClr val="1E53A4"/>
                 </a:solidFill>
               </a:rPr>
-              <a:t>переговоров с сетями в </a:t>
+              <a:t>переговоров с сетями в категории </a:t>
             </a:r>
             <a:r>
-              <a:rPr lang="ru-RU" sz="3500" dirty="0" smtClean="0">
-                <a:solidFill>
-                  <a:srgbClr val="1E53A4"/>
-                </a:solidFill>
-              </a:rPr>
-              <a:t>категории </a:t>
-            </a:r>
-            <a:r>
-              <a:rPr lang="en-US" sz="3500" dirty="0" smtClean="0">
+              <a:rPr lang="en-US" sz="3500" dirty="0">
                 <a:solidFill>
                   <a:srgbClr val="1E53A4"/>
                 </a:solidFill>
@@ -17553,7 +17485,7 @@
               <a:t>Перейдите по QR коду, </a:t>
             </a:r>
             <a:r>
-              <a:rPr lang="ru-RU" dirty="0" smtClean="0">
+              <a:rPr lang="ru-RU" dirty="0">
                 <a:solidFill>
                   <a:schemeClr val="dk1"/>
                 </a:solidFill>
@@ -17561,7 +17493,7 @@
               <a:t>на сайт </a:t>
             </a:r>
             <a:r>
-              <a:rPr lang="ru-RU" b="1" dirty="0" smtClean="0">
+              <a:rPr lang="ru-RU" b="1" dirty="0">
                 <a:solidFill>
                   <a:schemeClr val="tx1"/>
                 </a:solidFill>
@@ -17569,7 +17501,7 @@
               <a:t>ЦЗС™ </a:t>
             </a:r>
             <a:r>
-              <a:rPr lang="ru-RU" dirty="0" smtClean="0">
+              <a:rPr lang="ru-RU" dirty="0">
                 <a:solidFill>
                   <a:schemeClr val="tx1"/>
                 </a:solidFill>
@@ -19304,7 +19236,7 @@
                 <a:buNone/>
               </a:pPr>
               <a:r>
-                <a:rPr lang="ru-RU" sz="1000" dirty="0" smtClean="0">
+                <a:rPr lang="ru-RU" sz="1000" dirty="0">
                   <a:solidFill>
                     <a:schemeClr val="lt1"/>
                   </a:solidFill>
@@ -19316,7 +19248,7 @@
                 <a:t>4</a:t>
               </a:r>
               <a:r>
-                <a:rPr lang="ru-RU" sz="1000" dirty="0" smtClean="0">
+                <a:rPr lang="ru-RU" sz="1000" dirty="0">
                   <a:solidFill>
                     <a:srgbClr val="84B4E0"/>
                   </a:solidFill>
@@ -20832,7 +20764,7 @@
                 <a:buNone/>
               </a:pPr>
               <a:r>
-                <a:rPr lang="ru-RU" sz="1000" dirty="0" smtClean="0">
+                <a:rPr lang="ru-RU" sz="1000" dirty="0">
                   <a:solidFill>
                     <a:schemeClr val="lt1"/>
                   </a:solidFill>
@@ -20844,7 +20776,7 @@
                 <a:t>5</a:t>
               </a:r>
               <a:r>
-                <a:rPr lang="ru-RU" sz="1000" dirty="0" smtClean="0">
+                <a:rPr lang="ru-RU" sz="1000" dirty="0">
                   <a:solidFill>
                     <a:srgbClr val="84B4E0"/>
                   </a:solidFill>
@@ -20856,7 +20788,7 @@
                 <a:t>/</a:t>
               </a:r>
               <a:r>
-                <a:rPr lang="ru-RU" sz="1000" dirty="0" smtClean="0">
+                <a:rPr lang="ru-RU" sz="1000" dirty="0">
                   <a:solidFill>
                     <a:srgbClr val="84B4E0"/>
                   </a:solidFill>
@@ -21631,7 +21563,7 @@
           <a:p>
             <a:pPr algn="ctr"/>
             <a:r>
-              <a:rPr lang="en-US" dirty="0" smtClean="0"/>
+              <a:rPr lang="en-US" dirty="0"/>
               <a:t>{{pic2}}</a:t>
             </a:r>
             <a:endParaRPr lang="ru-RU" dirty="0"/>
@@ -21675,7 +21607,7 @@
           <a:p>
             <a:pPr algn="ctr"/>
             <a:r>
-              <a:rPr lang="en-US" dirty="0" smtClean="0"/>
+              <a:rPr lang="en-US" dirty="0"/>
               <a:t>{{pic3}}</a:t>
             </a:r>
             <a:endParaRPr lang="ru-RU" dirty="0"/>
@@ -21719,7 +21651,7 @@
           <a:p>
             <a:pPr algn="ctr"/>
             <a:r>
-              <a:rPr lang="en-US" dirty="0" smtClean="0"/>
+              <a:rPr lang="en-US" dirty="0"/>
               <a:t>{{pic4}}</a:t>
             </a:r>
             <a:endParaRPr lang="ru-RU" dirty="0"/>
@@ -21763,7 +21695,7 @@
           <a:p>
             <a:pPr algn="ctr"/>
             <a:r>
-              <a:rPr lang="en-US" dirty="0" smtClean="0"/>
+              <a:rPr lang="en-US" dirty="0"/>
               <a:t>{{pic5}}</a:t>
             </a:r>
             <a:endParaRPr lang="ru-RU" dirty="0"/>
@@ -21807,7 +21739,7 @@
           <a:p>
             <a:pPr algn="ctr"/>
             <a:r>
-              <a:rPr lang="en-US" dirty="0" smtClean="0"/>
+              <a:rPr lang="en-US" dirty="0"/>
               <a:t>{{pic6}}</a:t>
             </a:r>
             <a:endParaRPr lang="ru-RU" dirty="0"/>
@@ -21851,19 +21783,19 @@
           <a:p>
             <a:pPr algn="ctr"/>
             <a:r>
-              <a:rPr lang="en-US" dirty="0" smtClean="0"/>
+              <a:rPr lang="en-US" dirty="0"/>
               <a:t>{{</a:t>
             </a:r>
             <a:r>
-              <a:rPr lang="en-US" dirty="0" err="1" smtClean="0"/>
+              <a:rPr lang="en-US" dirty="0" err="1"/>
               <a:t>pic</a:t>
             </a:r>
             <a:r>
-              <a:rPr lang="ru-RU" dirty="0" smtClean="0"/>
+              <a:rPr lang="ru-RU" dirty="0"/>
               <a:t>7</a:t>
             </a:r>
             <a:r>
-              <a:rPr lang="en-US" dirty="0" smtClean="0"/>
+              <a:rPr lang="en-US" dirty="0"/>
               <a:t>}}</a:t>
             </a:r>
             <a:endParaRPr lang="ru-RU" dirty="0"/>
@@ -21961,7 +21893,7 @@
                 <a:buNone/>
               </a:pPr>
               <a:r>
-                <a:rPr lang="en-US" sz="1800" dirty="0" smtClean="0">
+                <a:rPr lang="en-US" sz="1800" dirty="0">
                   <a:solidFill>
                     <a:schemeClr val="lt1"/>
                   </a:solidFill>
@@ -22241,7 +22173,7 @@
                 <a:buNone/>
               </a:pPr>
               <a:r>
-                <a:rPr lang="ru-RU" sz="1000" dirty="0" smtClean="0">
+                <a:rPr lang="ru-RU" sz="1000" dirty="0">
                   <a:solidFill>
                     <a:schemeClr val="lt1"/>
                   </a:solidFill>
@@ -22249,7 +22181,7 @@
                 <a:t>6</a:t>
               </a:r>
               <a:r>
-                <a:rPr lang="ru-RU" sz="1000" dirty="0" smtClean="0">
+                <a:rPr lang="ru-RU" sz="1000" dirty="0">
                   <a:solidFill>
                     <a:srgbClr val="84B4E0"/>
                   </a:solidFill>
@@ -22465,7 +22397,7 @@
                 <a:buNone/>
               </a:pPr>
               <a:r>
-                <a:rPr lang="en-US" dirty="0" smtClean="0"/>
+                <a:rPr lang="en-US" dirty="0"/>
                 <a:t>{{block6}}</a:t>
               </a:r>
               <a:endParaRPr dirty="0"/>
@@ -22539,7 +22471,7 @@
         </p:nvGrpSpPr>
         <p:grpSpPr>
           <a:xfrm>
-            <a:off x="7893918" y="1736789"/>
+            <a:off x="7902215" y="1734879"/>
             <a:ext cx="3855170" cy="2314908"/>
             <a:chOff x="3792539" y="1876092"/>
             <a:chExt cx="3855170" cy="2314908"/>
@@ -22622,10 +22554,10 @@
             <a:p>
               <a:pPr lvl="0"/>
               <a:r>
-                <a:rPr lang="en-US" dirty="0" smtClean="0"/>
+                <a:rPr lang="en-US" dirty="0"/>
                 <a:t>{{block9}}</a:t>
               </a:r>
-              <a:endParaRPr dirty="0" smtClean="0"/>
+              <a:endParaRPr dirty="0"/>
             </a:p>
           </p:txBody>
         </p:sp>
@@ -22761,7 +22693,7 @@
           <p:spPr>
             <a:xfrm>
               <a:off x="3944198" y="2270857"/>
-              <a:ext cx="2439349" cy="307736"/>
+              <a:ext cx="2559536" cy="307736"/>
             </a:xfrm>
             <a:prstGeom prst="rect">
               <a:avLst/>
@@ -22779,10 +22711,10 @@
             <a:p>
               <a:pPr lvl="0"/>
               <a:r>
-                <a:rPr lang="en-US" dirty="0" smtClean="0"/>
+                <a:rPr lang="en-US" dirty="0"/>
                 <a:t>{{block12}}</a:t>
               </a:r>
-              <a:endParaRPr lang="en-US" sz="1100" dirty="0" smtClean="0"/>
+              <a:endParaRPr lang="en-US" sz="1100" dirty="0"/>
             </a:p>
           </p:txBody>
         </p:sp>
@@ -23451,7 +23383,7 @@
         </p:nvSpPr>
         <p:spPr>
           <a:xfrm>
-            <a:off x="6435306" y="2130725"/>
+            <a:off x="6632297" y="2121865"/>
             <a:ext cx="897147" cy="577969"/>
           </a:xfrm>
           <a:prstGeom prst="rect">
@@ -23480,7 +23412,7 @@
           <a:p>
             <a:pPr algn="ctr"/>
             <a:r>
-              <a:rPr lang="en-US" dirty="0" smtClean="0"/>
+              <a:rPr lang="en-US" dirty="0"/>
               <a:t>{{logo1}}</a:t>
             </a:r>
             <a:endParaRPr lang="ru-RU" dirty="0"/>
@@ -23495,7 +23427,7 @@
         </p:nvSpPr>
         <p:spPr>
           <a:xfrm>
-            <a:off x="3950898" y="2406770"/>
+            <a:off x="3942272" y="2500024"/>
             <a:ext cx="2432649" cy="261610"/>
           </a:xfrm>
           <a:prstGeom prst="rect">
@@ -23510,7 +23442,7 @@
           <a:lstStyle/>
           <a:p>
             <a:r>
-              <a:rPr lang="en-US" sz="1100" dirty="0" smtClean="0"/>
+              <a:rPr lang="en-US" sz="1100" dirty="0"/>
               <a:t>{{block7}}</a:t>
             </a:r>
             <a:endParaRPr lang="ru-RU" sz="1100" dirty="0"/>
@@ -23557,14 +23489,14 @@
           <a:lstStyle/>
           <a:p>
             <a:r>
-              <a:rPr lang="en-US" sz="1000" dirty="0" smtClean="0">
+              <a:rPr lang="en-US" sz="1000" dirty="0">
                 <a:solidFill>
                   <a:schemeClr val="tx1"/>
                 </a:solidFill>
               </a:rPr>
               <a:t>{{block8}}</a:t>
             </a:r>
-            <a:endParaRPr lang="ru-RU" sz="1000" dirty="0" smtClean="0">
+            <a:endParaRPr lang="ru-RU" sz="1000" dirty="0">
               <a:solidFill>
                 <a:schemeClr val="tx1"/>
               </a:solidFill>
@@ -23583,7 +23515,7 @@
         </p:nvSpPr>
         <p:spPr>
           <a:xfrm>
-            <a:off x="10668000" y="2127850"/>
+            <a:off x="10740283" y="2134772"/>
             <a:ext cx="897147" cy="577969"/>
           </a:xfrm>
           <a:prstGeom prst="rect">
@@ -23612,7 +23544,7 @@
           <a:p>
             <a:pPr algn="ctr"/>
             <a:r>
-              <a:rPr lang="en-US" dirty="0" smtClean="0"/>
+              <a:rPr lang="en-US" dirty="0"/>
               <a:t>{{logo2}}</a:t>
             </a:r>
             <a:endParaRPr lang="ru-RU" dirty="0"/>
@@ -23627,7 +23559,7 @@
         </p:nvSpPr>
         <p:spPr>
           <a:xfrm>
-            <a:off x="6458310" y="4474234"/>
+            <a:off x="6627148" y="4471301"/>
             <a:ext cx="897147" cy="577969"/>
           </a:xfrm>
           <a:prstGeom prst="rect">
@@ -23656,7 +23588,7 @@
           <a:p>
             <a:pPr algn="ctr"/>
             <a:r>
-              <a:rPr lang="en-US" dirty="0" smtClean="0"/>
+              <a:rPr lang="en-US" dirty="0"/>
               <a:t>{{logo3}}</a:t>
             </a:r>
             <a:endParaRPr lang="ru-RU" dirty="0"/>
@@ -23671,7 +23603,7 @@
         </p:nvSpPr>
         <p:spPr>
           <a:xfrm>
-            <a:off x="8117456" y="2458528"/>
+            <a:off x="8107626" y="2579980"/>
             <a:ext cx="2449901" cy="261610"/>
           </a:xfrm>
           <a:prstGeom prst="rect">
@@ -23687,7 +23619,7 @@
           <a:p>
             <a:pPr lvl="0"/>
             <a:r>
-              <a:rPr lang="en-US" sz="1100" dirty="0" smtClean="0"/>
+              <a:rPr lang="en-US" sz="1100" dirty="0"/>
               <a:t>{{block10}}</a:t>
             </a:r>
             <a:endParaRPr lang="ru-RU" sz="1100" dirty="0"/>
@@ -23717,11 +23649,11 @@
           <a:lstStyle/>
           <a:p>
             <a:r>
-              <a:rPr lang="en-US" dirty="0" smtClean="0"/>
+              <a:rPr lang="en-US" dirty="0"/>
               <a:t> </a:t>
             </a:r>
             <a:r>
-              <a:rPr lang="en-US" sz="1000" dirty="0" smtClean="0"/>
+              <a:rPr lang="en-US" sz="1000" dirty="0"/>
               <a:t>{{block11}}</a:t>
             </a:r>
             <a:endParaRPr lang="ru-RU" sz="1000" dirty="0"/>
@@ -23736,7 +23668,7 @@
         </p:nvSpPr>
         <p:spPr>
           <a:xfrm>
-            <a:off x="3976777" y="4787660"/>
+            <a:off x="3949968" y="4886235"/>
             <a:ext cx="2424023" cy="261610"/>
           </a:xfrm>
           <a:prstGeom prst="rect">
@@ -23752,7 +23684,7 @@
           <a:p>
             <a:pPr lvl="0"/>
             <a:r>
-              <a:rPr lang="en-US" sz="1100" dirty="0" smtClean="0"/>
+              <a:rPr lang="en-US" sz="1100" dirty="0"/>
               <a:t>{{block13}}</a:t>
             </a:r>
             <a:endParaRPr lang="ru-RU" sz="1100" dirty="0"/>
@@ -23782,7 +23714,7 @@
           <a:lstStyle/>
           <a:p>
             <a:r>
-              <a:rPr lang="en-US" sz="1000" dirty="0" smtClean="0"/>
+              <a:rPr lang="en-US" sz="1000" dirty="0"/>
               <a:t>{{block14}}</a:t>
             </a:r>
             <a:endParaRPr lang="ru-RU" dirty="0"/>
